--- a/docs/Slides_under_a_magnifying_glass.pptx
+++ b/docs/Slides_under_a_magnifying_glass.pptx
@@ -2576,6 +2576,85 @@
           </a:p>
         </p:txBody>
       </p:sp>
+      <p:sp>
+        <p:nvSpPr>
+          <p:cNvPr id="10" name="TextBox 9">
+            <a:extLst>
+              <a:ext uri="{FF2B5EF4-FFF2-40B4-BE49-F238E27FC236}">
+                <a16:creationId xmlns:a16="http://schemas.microsoft.com/office/drawing/2014/main" id="{CEB6E3C3-6AC3-22F1-20A7-21CB2AAF65B0}"/>
+              </a:ext>
+            </a:extLst>
+          </p:cNvPr>
+          <p:cNvSpPr txBox="1"/>
+          <p:nvPr/>
+        </p:nvSpPr>
+        <p:spPr>
+          <a:xfrm>
+            <a:off x="3048886" y="3105835"/>
+            <a:ext cx="6097772" cy="646331"/>
+          </a:xfrm>
+          <a:prstGeom prst="rect">
+            <a:avLst/>
+          </a:prstGeom>
+          <a:noFill/>
+        </p:spPr>
+        <p:txBody>
+          <a:bodyPr wrap="square">
+            <a:spAutoFit/>
+          </a:bodyPr>
+          <a:lstStyle/>
+          <a:p>
+            <a:r>
+              <a:rPr lang="en-US" dirty="0" err="1"/>
+              <a:t>забыл</a:t>
+            </a:r>
+            <a:r>
+              <a:rPr lang="en-US" dirty="0"/>
+              <a:t> </a:t>
+            </a:r>
+            <a:r>
+              <a:rPr lang="en-US" dirty="0" err="1"/>
+              <a:t>упомянуть</a:t>
+            </a:r>
+            <a:r>
+              <a:rPr lang="en-US" dirty="0"/>
+              <a:t>, </a:t>
+            </a:r>
+            <a:r>
+              <a:rPr lang="en-US" dirty="0" err="1"/>
+              <a:t>выступление</a:t>
+            </a:r>
+            <a:r>
+              <a:rPr lang="en-US" dirty="0"/>
+              <a:t> </a:t>
+            </a:r>
+            <a:r>
+              <a:rPr lang="en-US" dirty="0" err="1"/>
+              <a:t>будет</a:t>
+            </a:r>
+            <a:r>
+              <a:rPr lang="en-US" dirty="0"/>
+              <a:t> </a:t>
+            </a:r>
+            <a:r>
+              <a:rPr lang="en-US" dirty="0" err="1"/>
+              <a:t>на</a:t>
+            </a:r>
+            <a:r>
+              <a:rPr lang="en-US" dirty="0"/>
+              <a:t> </a:t>
+            </a:r>
+            <a:r>
+              <a:rPr lang="en-US" dirty="0" err="1"/>
+              <a:t>английском</a:t>
+            </a:r>
+            <a:endParaRPr lang="en-US" dirty="0"/>
+          </a:p>
+          <a:p>
+            <a:endParaRPr lang="en-US" dirty="0"/>
+          </a:p>
+        </p:txBody>
+      </p:sp>
     </p:spTree>
   </p:cSld>
   <p:clrMapOvr>
@@ -2811,7 +2890,29 @@
                 <a:ea typeface="IBM Plex Sans" pitchFamily="34" charset="-122"/>
                 <a:cs typeface="IBM Plex Sans" pitchFamily="34" charset="-120"/>
               </a:rPr>
-              <a:t>13 points for about 490 more tokens</a:t>
+              <a:t>13 points for </a:t>
+            </a:r>
+            <a:r>
+              <a:rPr lang="ru-RU" sz="1400" dirty="0">
+                <a:solidFill>
+                  <a:srgbClr val="3C4656"/>
+                </a:solidFill>
+                <a:latin typeface="IBM Plex Sans" pitchFamily="34" charset="0"/>
+                <a:ea typeface="IBM Plex Sans" pitchFamily="34" charset="-122"/>
+                <a:cs typeface="IBM Plex Sans" pitchFamily="34" charset="-120"/>
+              </a:rPr>
+              <a:t>256 –</a:t>
+            </a:r>
+            <a:r>
+              <a:rPr lang="en-US" sz="1400" dirty="0">
+                <a:solidFill>
+                  <a:srgbClr val="3C4656"/>
+                </a:solidFill>
+                <a:latin typeface="IBM Plex Sans" pitchFamily="34" charset="0"/>
+                <a:ea typeface="IBM Plex Sans" pitchFamily="34" charset="-122"/>
+                <a:cs typeface="IBM Plex Sans" pitchFamily="34" charset="-120"/>
+              </a:rPr>
+              <a:t>&gt; 768</a:t>
             </a:r>
             <a:endParaRPr lang="en-US" sz="1400" dirty="0"/>
           </a:p>
@@ -3661,7 +3762,7 @@
                 <a:ea typeface="Source Serif 4" pitchFamily="18" charset="-122"/>
                 <a:cs typeface="Source Serif 4" pitchFamily="18" charset="-120"/>
               </a:rPr>
-              <a:t>Own and dense slides, 2560 px</a:t>
+              <a:t>Own and dense slides, @ 2560 px</a:t>
             </a:r>
             <a:endParaRPr lang="en-US" sz="3000" dirty="0"/>
           </a:p>
@@ -4166,7 +4267,26 @@
                 <a:ea typeface="Source Serif 4" pitchFamily="18" charset="-122"/>
                 <a:cs typeface="Source Serif 4" pitchFamily="18" charset="-120"/>
               </a:rPr>
-              <a:t>Detail type, 20 own questions</a:t>
+              <a:t>Heatmap by detail type</a:t>
+            </a:r>
+            <a:r>
+              <a:rPr lang="en-US" b="1" dirty="0">
+                <a:latin typeface="Source Serif 4" pitchFamily="18" charset="0"/>
+                <a:ea typeface="Source Serif 4" pitchFamily="18" charset="-122"/>
+                <a:cs typeface="Source Serif 4" pitchFamily="18" charset="-120"/>
+              </a:rPr>
+              <a:t> on </a:t>
+            </a:r>
+            <a:r>
+              <a:rPr lang="en-US" sz="3000" b="1" i="0" dirty="0">
+                <a:solidFill>
+                  <a:srgbClr val="17243B"/>
+                </a:solidFill>
+                <a:latin typeface="Source Serif 4" pitchFamily="18" charset="0"/>
+                <a:ea typeface="Source Serif 4" pitchFamily="18" charset="-122"/>
+                <a:cs typeface="Source Serif 4" pitchFamily="18" charset="-120"/>
+              </a:rPr>
+              <a:t>20 own questions</a:t>
             </a:r>
             <a:endParaRPr lang="en-US" sz="3000" dirty="0"/>
           </a:p>
@@ -6680,7 +6800,7 @@
                 <a:ea typeface="IBM Plex Sans" pitchFamily="34" charset="-122"/>
                 <a:cs typeface="IBM Plex Sans" pitchFamily="34" charset="-120"/>
               </a:rPr>
-              <a:t>dense_17: A answers 17.5 (wrong), D answers 368.5 (right), but its box covers the row label “DIAMOND-HQ”, not the number.</a:t>
+              <a:t>Will demonstrate in the demo.</a:t>
             </a:r>
             <a:endParaRPr lang="en-US" sz="1400" dirty="0"/>
           </a:p>
@@ -7000,18 +7120,19 @@
                 <a:ea typeface="IBM Plex Sans" pitchFamily="34" charset="-122"/>
                 <a:cs typeface="IBM Plex Sans" pitchFamily="34" charset="-120"/>
               </a:rPr>
-              <a:t>The 40 own and dense questions are ours, on 17 slides, and the dense slides were picked for small print.</a:t>
-            </a:r>
-            <a:endParaRPr lang="en-US" sz="1500" dirty="0"/>
-          </a:p>
-          <a:p>
-            <a:pPr marL="182880" indent="-182880" algn="l">
-              <a:lnSpc>
-                <a:spcPts val="2325"/>
-              </a:lnSpc>
-              <a:buSzPct val="100000"/>
-              <a:buChar char="•"/>
-            </a:pPr>
+              <a:t>The 40 own and dense questions are ours, on 17 slides, and the dense slides add </a:t>
+            </a:r>
+            <a:r>
+              <a:rPr lang="en-US" sz="1500" dirty="0" err="1">
+                <a:solidFill>
+                  <a:srgbClr val="3C4656"/>
+                </a:solidFill>
+                <a:latin typeface="IBM Plex Sans" pitchFamily="34" charset="0"/>
+                <a:ea typeface="IBM Plex Sans" pitchFamily="34" charset="-122"/>
+                <a:cs typeface="IBM Plex Sans" pitchFamily="34" charset="-120"/>
+              </a:rPr>
+              <a:t>biad</a:t>
+            </a:r>
             <a:r>
               <a:rPr lang="en-US" sz="1500" dirty="0">
                 <a:solidFill>
@@ -7021,7 +7142,7 @@
                 <a:ea typeface="IBM Plex Sans" pitchFamily="34" charset="-122"/>
                 <a:cs typeface="IBM Plex Sans" pitchFamily="34" charset="-120"/>
               </a:rPr>
-              <a:t>Error categories come from samples of 30, assigned in one pass by an AI assistant and checked by one author.</a:t>
+              <a:t> with agents which work better with small text.</a:t>
             </a:r>
             <a:endParaRPr lang="en-US" sz="1500" dirty="0"/>
           </a:p>
@@ -7366,7 +7487,7 @@
                 <a:ea typeface="IBM Plex Sans" pitchFamily="34" charset="-122"/>
                 <a:cs typeface="IBM Plex Sans" pitchFamily="34" charset="-120"/>
               </a:rPr>
-              <a:t>On 2560 px slides zoom lifts D from 0.62 (A) to 0.85, but A at 768 tokens (0.90) and B (0.93) are within noise of it. Fixed tiles score highest on dense small print (0.95).</a:t>
+              <a:t>On 2560 px slides zoom lifts D from 0.62 (A) to 0.85, but A at 768 tokens (0.90) and B (0.93) are within noise range. Fixed tiles score highest on dense small print (0.95).</a:t>
             </a:r>
             <a:endParaRPr lang="en-US" sz="1600" dirty="0"/>
           </a:p>
